--- a/koreatech-db/weeks/09주차_서브쿼리와_집합_연산.pptx
+++ b/koreatech-db/weeks/09주차_서브쿼리와_집합_연산.pptx
@@ -4056,9 +4056,9 @@
                 <a:solidFill>
                   <a:srgbClr val="7A869C"/>
                 </a:solidFill>
-                <a:latin typeface="나눔고딕코딩"/>
-                <a:ea typeface="나눔고딕코딩"/>
-                <a:cs typeface="나눔고딕코딩"/>
+                <a:latin typeface="D2Coding"/>
+                <a:ea typeface="D2Coding"/>
+                <a:cs typeface="D2Coding"/>
               </a:rPr>
               <a:t>1</a:t>
             </a:r>
@@ -4074,9 +4074,9 @@
                 <a:solidFill>
                   <a:srgbClr val="7A869C"/>
                 </a:solidFill>
-                <a:latin typeface="나눔고딕코딩"/>
-                <a:ea typeface="나눔고딕코딩"/>
-                <a:cs typeface="나눔고딕코딩"/>
+                <a:latin typeface="D2Coding"/>
+                <a:ea typeface="D2Coding"/>
+                <a:cs typeface="D2Coding"/>
               </a:rPr>
               <a:t>2</a:t>
             </a:r>
@@ -4092,9 +4092,9 @@
                 <a:solidFill>
                   <a:srgbClr val="7A869C"/>
                 </a:solidFill>
-                <a:latin typeface="나눔고딕코딩"/>
-                <a:ea typeface="나눔고딕코딩"/>
-                <a:cs typeface="나눔고딕코딩"/>
+                <a:latin typeface="D2Coding"/>
+                <a:ea typeface="D2Coding"/>
+                <a:cs typeface="D2Coding"/>
               </a:rPr>
               <a:t>3</a:t>
             </a:r>
@@ -4110,9 +4110,9 @@
                 <a:solidFill>
                   <a:srgbClr val="7A869C"/>
                 </a:solidFill>
-                <a:latin typeface="나눔고딕코딩"/>
-                <a:ea typeface="나눔고딕코딩"/>
-                <a:cs typeface="나눔고딕코딩"/>
+                <a:latin typeface="D2Coding"/>
+                <a:ea typeface="D2Coding"/>
+                <a:cs typeface="D2Coding"/>
               </a:rPr>
               <a:t>4</a:t>
             </a:r>
@@ -4128,9 +4128,9 @@
                 <a:solidFill>
                   <a:srgbClr val="7A869C"/>
                 </a:solidFill>
-                <a:latin typeface="나눔고딕코딩"/>
-                <a:ea typeface="나눔고딕코딩"/>
-                <a:cs typeface="나눔고딕코딩"/>
+                <a:latin typeface="D2Coding"/>
+                <a:ea typeface="D2Coding"/>
+                <a:cs typeface="D2Coding"/>
               </a:rPr>
               <a:t>5</a:t>
             </a:r>
@@ -4169,9 +4169,9 @@
                 <a:solidFill>
                   <a:srgbClr val="E6EAF2"/>
                 </a:solidFill>
-                <a:latin typeface="나눔고딕코딩"/>
-                <a:ea typeface="나눔고딕코딩"/>
-                <a:cs typeface="나눔고딕코딩"/>
+                <a:latin typeface="D2Coding"/>
+                <a:ea typeface="D2Coding"/>
+                <a:cs typeface="D2Coding"/>
               </a:rPr>
               <a:t>SELECT name, price FROM products</a:t>
             </a:r>
@@ -4187,9 +4187,9 @@
                 <a:solidFill>
                   <a:srgbClr val="E6EAF2"/>
                 </a:solidFill>
-                <a:latin typeface="나눔고딕코딩"/>
-                <a:ea typeface="나눔고딕코딩"/>
-                <a:cs typeface="나눔고딕코딩"/>
+                <a:latin typeface="D2Coding"/>
+                <a:ea typeface="D2Coding"/>
+                <a:cs typeface="D2Coding"/>
               </a:rPr>
               <a:t>WHERE  price &gt; ANY (SELECT price FROM products WHERE category = '식품');</a:t>
             </a:r>
@@ -4205,9 +4205,9 @@
                 <a:solidFill>
                   <a:srgbClr val="E6EAF2"/>
                 </a:solidFill>
-                <a:latin typeface="나눔고딕코딩"/>
-                <a:ea typeface="나눔고딕코딩"/>
-                <a:cs typeface="나눔고딕코딩"/>
+                <a:latin typeface="D2Coding"/>
+                <a:ea typeface="D2Coding"/>
+                <a:cs typeface="D2Coding"/>
               </a:rPr>
               <a:t/>
             </a:r>
@@ -4223,9 +4223,9 @@
                 <a:solidFill>
                   <a:srgbClr val="E6EAF2"/>
                 </a:solidFill>
-                <a:latin typeface="나눔고딕코딩"/>
-                <a:ea typeface="나눔고딕코딩"/>
-                <a:cs typeface="나눔고딕코딩"/>
+                <a:latin typeface="D2Coding"/>
+                <a:ea typeface="D2Coding"/>
+                <a:cs typeface="D2Coding"/>
               </a:rPr>
               <a:t>SELECT name, price FROM products</a:t>
             </a:r>
@@ -4241,9 +4241,9 @@
                 <a:solidFill>
                   <a:srgbClr val="E6EAF2"/>
                 </a:solidFill>
-                <a:latin typeface="나눔고딕코딩"/>
-                <a:ea typeface="나눔고딕코딩"/>
-                <a:cs typeface="나눔고딕코딩"/>
+                <a:latin typeface="D2Coding"/>
+                <a:ea typeface="D2Coding"/>
+                <a:cs typeface="D2Coding"/>
               </a:rPr>
               <a:t>WHERE  price &gt; ALL (SELECT price FROM products WHERE category = '식품');</a:t>
             </a:r>
@@ -7270,9 +7270,9 @@
                 <a:solidFill>
                   <a:srgbClr val="7A869C"/>
                 </a:solidFill>
-                <a:latin typeface="나눔고딕코딩"/>
-                <a:ea typeface="나눔고딕코딩"/>
-                <a:cs typeface="나눔고딕코딩"/>
+                <a:latin typeface="D2Coding"/>
+                <a:ea typeface="D2Coding"/>
+                <a:cs typeface="D2Coding"/>
               </a:rPr>
               <a:t>1</a:t>
             </a:r>
@@ -7288,9 +7288,9 @@
                 <a:solidFill>
                   <a:srgbClr val="7A869C"/>
                 </a:solidFill>
-                <a:latin typeface="나눔고딕코딩"/>
-                <a:ea typeface="나눔고딕코딩"/>
-                <a:cs typeface="나눔고딕코딩"/>
+                <a:latin typeface="D2Coding"/>
+                <a:ea typeface="D2Coding"/>
+                <a:cs typeface="D2Coding"/>
               </a:rPr>
               <a:t>2</a:t>
             </a:r>
@@ -7306,9 +7306,9 @@
                 <a:solidFill>
                   <a:srgbClr val="7A869C"/>
                 </a:solidFill>
-                <a:latin typeface="나눔고딕코딩"/>
-                <a:ea typeface="나눔고딕코딩"/>
-                <a:cs typeface="나눔고딕코딩"/>
+                <a:latin typeface="D2Coding"/>
+                <a:ea typeface="D2Coding"/>
+                <a:cs typeface="D2Coding"/>
               </a:rPr>
               <a:t>3</a:t>
             </a:r>
@@ -7324,9 +7324,9 @@
                 <a:solidFill>
                   <a:srgbClr val="7A869C"/>
                 </a:solidFill>
-                <a:latin typeface="나눔고딕코딩"/>
-                <a:ea typeface="나눔고딕코딩"/>
-                <a:cs typeface="나눔고딕코딩"/>
+                <a:latin typeface="D2Coding"/>
+                <a:ea typeface="D2Coding"/>
+                <a:cs typeface="D2Coding"/>
               </a:rPr>
               <a:t>4</a:t>
             </a:r>
@@ -7365,9 +7365,9 @@
                 <a:solidFill>
                   <a:srgbClr val="E6EAF2"/>
                 </a:solidFill>
-                <a:latin typeface="나눔고딕코딩"/>
-                <a:ea typeface="나눔고딕코딩"/>
-                <a:cs typeface="나눔고딕코딩"/>
+                <a:latin typeface="D2Coding"/>
+                <a:ea typeface="D2Coding"/>
+                <a:cs typeface="D2Coding"/>
               </a:rPr>
               <a:t>SELECT p.name, p.category, p.price</a:t>
             </a:r>
@@ -7383,9 +7383,9 @@
                 <a:solidFill>
                   <a:srgbClr val="E6EAF2"/>
                 </a:solidFill>
-                <a:latin typeface="나눔고딕코딩"/>
-                <a:ea typeface="나눔고딕코딩"/>
-                <a:cs typeface="나눔고딕코딩"/>
+                <a:latin typeface="D2Coding"/>
+                <a:ea typeface="D2Coding"/>
+                <a:cs typeface="D2Coding"/>
               </a:rPr>
               <a:t>FROM   products p</a:t>
             </a:r>
@@ -7401,9 +7401,9 @@
                 <a:solidFill>
                   <a:srgbClr val="E6EAF2"/>
                 </a:solidFill>
-                <a:latin typeface="나눔고딕코딩"/>
-                <a:ea typeface="나눔고딕코딩"/>
-                <a:cs typeface="나눔고딕코딩"/>
+                <a:latin typeface="D2Coding"/>
+                <a:ea typeface="D2Coding"/>
+                <a:cs typeface="D2Coding"/>
               </a:rPr>
               <a:t>WHERE  p.price &gt; (SELECT AVG(x.price) FROM products x</a:t>
             </a:r>
@@ -7419,9 +7419,9 @@
                 <a:solidFill>
                   <a:srgbClr val="E6EAF2"/>
                 </a:solidFill>
-                <a:latin typeface="나눔고딕코딩"/>
-                <a:ea typeface="나눔고딕코딩"/>
-                <a:cs typeface="나눔고딕코딩"/>
+                <a:latin typeface="D2Coding"/>
+                <a:ea typeface="D2Coding"/>
+                <a:cs typeface="D2Coding"/>
               </a:rPr>
               <a:t>                  WHERE x.category = p.category);</a:t>
             </a:r>
@@ -10351,9 +10351,9 @@
                 <a:solidFill>
                   <a:srgbClr val="7A869C"/>
                 </a:solidFill>
-                <a:latin typeface="나눔고딕코딩"/>
-                <a:ea typeface="나눔고딕코딩"/>
-                <a:cs typeface="나눔고딕코딩"/>
+                <a:latin typeface="D2Coding"/>
+                <a:ea typeface="D2Coding"/>
+                <a:cs typeface="D2Coding"/>
               </a:rPr>
               <a:t>1</a:t>
             </a:r>
@@ -10369,9 +10369,9 @@
                 <a:solidFill>
                   <a:srgbClr val="7A869C"/>
                 </a:solidFill>
-                <a:latin typeface="나눔고딕코딩"/>
-                <a:ea typeface="나눔고딕코딩"/>
-                <a:cs typeface="나눔고딕코딩"/>
+                <a:latin typeface="D2Coding"/>
+                <a:ea typeface="D2Coding"/>
+                <a:cs typeface="D2Coding"/>
               </a:rPr>
               <a:t>2</a:t>
             </a:r>
@@ -10387,9 +10387,9 @@
                 <a:solidFill>
                   <a:srgbClr val="7A869C"/>
                 </a:solidFill>
-                <a:latin typeface="나눔고딕코딩"/>
-                <a:ea typeface="나눔고딕코딩"/>
-                <a:cs typeface="나눔고딕코딩"/>
+                <a:latin typeface="D2Coding"/>
+                <a:ea typeface="D2Coding"/>
+                <a:cs typeface="D2Coding"/>
               </a:rPr>
               <a:t>3</a:t>
             </a:r>
@@ -10405,9 +10405,9 @@
                 <a:solidFill>
                   <a:srgbClr val="7A869C"/>
                 </a:solidFill>
-                <a:latin typeface="나눔고딕코딩"/>
-                <a:ea typeface="나눔고딕코딩"/>
-                <a:cs typeface="나눔고딕코딩"/>
+                <a:latin typeface="D2Coding"/>
+                <a:ea typeface="D2Coding"/>
+                <a:cs typeface="D2Coding"/>
               </a:rPr>
               <a:t>4</a:t>
             </a:r>
@@ -10423,9 +10423,9 @@
                 <a:solidFill>
                   <a:srgbClr val="7A869C"/>
                 </a:solidFill>
-                <a:latin typeface="나눔고딕코딩"/>
-                <a:ea typeface="나눔고딕코딩"/>
-                <a:cs typeface="나눔고딕코딩"/>
+                <a:latin typeface="D2Coding"/>
+                <a:ea typeface="D2Coding"/>
+                <a:cs typeface="D2Coding"/>
               </a:rPr>
               <a:t>5</a:t>
             </a:r>
@@ -10441,9 +10441,9 @@
                 <a:solidFill>
                   <a:srgbClr val="7A869C"/>
                 </a:solidFill>
-                <a:latin typeface="나눔고딕코딩"/>
-                <a:ea typeface="나눔고딕코딩"/>
-                <a:cs typeface="나눔고딕코딩"/>
+                <a:latin typeface="D2Coding"/>
+                <a:ea typeface="D2Coding"/>
+                <a:cs typeface="D2Coding"/>
               </a:rPr>
               <a:t>6</a:t>
             </a:r>
@@ -10459,9 +10459,9 @@
                 <a:solidFill>
                   <a:srgbClr val="7A869C"/>
                 </a:solidFill>
-                <a:latin typeface="나눔고딕코딩"/>
-                <a:ea typeface="나눔고딕코딩"/>
-                <a:cs typeface="나눔고딕코딩"/>
+                <a:latin typeface="D2Coding"/>
+                <a:ea typeface="D2Coding"/>
+                <a:cs typeface="D2Coding"/>
               </a:rPr>
               <a:t>7</a:t>
             </a:r>
@@ -10500,9 +10500,9 @@
                 <a:solidFill>
                   <a:srgbClr val="E6EAF2"/>
                 </a:solidFill>
-                <a:latin typeface="나눔고딕코딩"/>
-                <a:ea typeface="나눔고딕코딩"/>
-                <a:cs typeface="나눔고딕코딩"/>
+                <a:latin typeface="D2Coding"/>
+                <a:ea typeface="D2Coding"/>
+                <a:cs typeface="D2Coding"/>
               </a:rPr>
               <a:t>SELECT c.cust_id, c.name</a:t>
             </a:r>
@@ -10518,9 +10518,9 @@
                 <a:solidFill>
                   <a:srgbClr val="E6EAF2"/>
                 </a:solidFill>
-                <a:latin typeface="나눔고딕코딩"/>
-                <a:ea typeface="나눔고딕코딩"/>
-                <a:cs typeface="나눔고딕코딩"/>
+                <a:latin typeface="D2Coding"/>
+                <a:ea typeface="D2Coding"/>
+                <a:cs typeface="D2Coding"/>
               </a:rPr>
               <a:t>FROM   customers c</a:t>
             </a:r>
@@ -10536,9 +10536,9 @@
                 <a:solidFill>
                   <a:srgbClr val="E6EAF2"/>
                 </a:solidFill>
-                <a:latin typeface="나눔고딕코딩"/>
-                <a:ea typeface="나눔고딕코딩"/>
-                <a:cs typeface="나눔고딕코딩"/>
+                <a:latin typeface="D2Coding"/>
+                <a:ea typeface="D2Coding"/>
+                <a:cs typeface="D2Coding"/>
               </a:rPr>
               <a:t>WHERE  EXISTS (SELECT 1 FROM orders o WHERE o.cust_id = c.cust_id);</a:t>
             </a:r>
@@ -10554,9 +10554,9 @@
                 <a:solidFill>
                   <a:srgbClr val="E6EAF2"/>
                 </a:solidFill>
-                <a:latin typeface="나눔고딕코딩"/>
-                <a:ea typeface="나눔고딕코딩"/>
-                <a:cs typeface="나눔고딕코딩"/>
+                <a:latin typeface="D2Coding"/>
+                <a:ea typeface="D2Coding"/>
+                <a:cs typeface="D2Coding"/>
               </a:rPr>
               <a:t/>
             </a:r>
@@ -10572,9 +10572,9 @@
                 <a:solidFill>
                   <a:srgbClr val="E6EAF2"/>
                 </a:solidFill>
-                <a:latin typeface="나눔고딕코딩"/>
-                <a:ea typeface="나눔고딕코딩"/>
-                <a:cs typeface="나눔고딕코딩"/>
+                <a:latin typeface="D2Coding"/>
+                <a:ea typeface="D2Coding"/>
+                <a:cs typeface="D2Coding"/>
               </a:rPr>
               <a:t>SELECT c.cust_id, c.name</a:t>
             </a:r>
@@ -10590,9 +10590,9 @@
                 <a:solidFill>
                   <a:srgbClr val="E6EAF2"/>
                 </a:solidFill>
-                <a:latin typeface="나눔고딕코딩"/>
-                <a:ea typeface="나눔고딕코딩"/>
-                <a:cs typeface="나눔고딕코딩"/>
+                <a:latin typeface="D2Coding"/>
+                <a:ea typeface="D2Coding"/>
+                <a:cs typeface="D2Coding"/>
               </a:rPr>
               <a:t>FROM   customers c</a:t>
             </a:r>
@@ -10608,9 +10608,9 @@
                 <a:solidFill>
                   <a:srgbClr val="E6EAF2"/>
                 </a:solidFill>
-                <a:latin typeface="나눔고딕코딩"/>
-                <a:ea typeface="나눔고딕코딩"/>
-                <a:cs typeface="나눔고딕코딩"/>
+                <a:latin typeface="D2Coding"/>
+                <a:ea typeface="D2Coding"/>
+                <a:cs typeface="D2Coding"/>
               </a:rPr>
               <a:t>WHERE  NOT EXISTS (SELECT 1 FROM orders o WHERE o.cust_id = c.cust_id);</a:t>
             </a:r>
@@ -13187,9 +13187,9 @@
                 <a:solidFill>
                   <a:srgbClr val="7A869C"/>
                 </a:solidFill>
-                <a:latin typeface="나눔고딕코딩"/>
-                <a:ea typeface="나눔고딕코딩"/>
-                <a:cs typeface="나눔고딕코딩"/>
+                <a:latin typeface="D2Coding"/>
+                <a:ea typeface="D2Coding"/>
+                <a:cs typeface="D2Coding"/>
               </a:rPr>
               <a:t>1</a:t>
             </a:r>
@@ -13205,9 +13205,9 @@
                 <a:solidFill>
                   <a:srgbClr val="7A869C"/>
                 </a:solidFill>
-                <a:latin typeface="나눔고딕코딩"/>
-                <a:ea typeface="나눔고딕코딩"/>
-                <a:cs typeface="나눔고딕코딩"/>
+                <a:latin typeface="D2Coding"/>
+                <a:ea typeface="D2Coding"/>
+                <a:cs typeface="D2Coding"/>
               </a:rPr>
               <a:t>2</a:t>
             </a:r>
@@ -13223,9 +13223,9 @@
                 <a:solidFill>
                   <a:srgbClr val="7A869C"/>
                 </a:solidFill>
-                <a:latin typeface="나눔고딕코딩"/>
-                <a:ea typeface="나눔고딕코딩"/>
-                <a:cs typeface="나눔고딕코딩"/>
+                <a:latin typeface="D2Coding"/>
+                <a:ea typeface="D2Coding"/>
+                <a:cs typeface="D2Coding"/>
               </a:rPr>
               <a:t>3</a:t>
             </a:r>
@@ -13241,9 +13241,9 @@
                 <a:solidFill>
                   <a:srgbClr val="7A869C"/>
                 </a:solidFill>
-                <a:latin typeface="나눔고딕코딩"/>
-                <a:ea typeface="나눔고딕코딩"/>
-                <a:cs typeface="나눔고딕코딩"/>
+                <a:latin typeface="D2Coding"/>
+                <a:ea typeface="D2Coding"/>
+                <a:cs typeface="D2Coding"/>
               </a:rPr>
               <a:t>4</a:t>
             </a:r>
@@ -13259,9 +13259,9 @@
                 <a:solidFill>
                   <a:srgbClr val="7A869C"/>
                 </a:solidFill>
-                <a:latin typeface="나눔고딕코딩"/>
-                <a:ea typeface="나눔고딕코딩"/>
-                <a:cs typeface="나눔고딕코딩"/>
+                <a:latin typeface="D2Coding"/>
+                <a:ea typeface="D2Coding"/>
+                <a:cs typeface="D2Coding"/>
               </a:rPr>
               <a:t>5</a:t>
             </a:r>
@@ -13277,9 +13277,9 @@
                 <a:solidFill>
                   <a:srgbClr val="7A869C"/>
                 </a:solidFill>
-                <a:latin typeface="나눔고딕코딩"/>
-                <a:ea typeface="나눔고딕코딩"/>
-                <a:cs typeface="나눔고딕코딩"/>
+                <a:latin typeface="D2Coding"/>
+                <a:ea typeface="D2Coding"/>
+                <a:cs typeface="D2Coding"/>
               </a:rPr>
               <a:t>6</a:t>
             </a:r>
@@ -13295,9 +13295,9 @@
                 <a:solidFill>
                   <a:srgbClr val="7A869C"/>
                 </a:solidFill>
-                <a:latin typeface="나눔고딕코딩"/>
-                <a:ea typeface="나눔고딕코딩"/>
-                <a:cs typeface="나눔고딕코딩"/>
+                <a:latin typeface="D2Coding"/>
+                <a:ea typeface="D2Coding"/>
+                <a:cs typeface="D2Coding"/>
               </a:rPr>
               <a:t>7</a:t>
             </a:r>
@@ -13313,9 +13313,9 @@
                 <a:solidFill>
                   <a:srgbClr val="7A869C"/>
                 </a:solidFill>
-                <a:latin typeface="나눔고딕코딩"/>
-                <a:ea typeface="나눔고딕코딩"/>
-                <a:cs typeface="나눔고딕코딩"/>
+                <a:latin typeface="D2Coding"/>
+                <a:ea typeface="D2Coding"/>
+                <a:cs typeface="D2Coding"/>
               </a:rPr>
               <a:t>8</a:t>
             </a:r>
@@ -13331,9 +13331,9 @@
                 <a:solidFill>
                   <a:srgbClr val="7A869C"/>
                 </a:solidFill>
-                <a:latin typeface="나눔고딕코딩"/>
-                <a:ea typeface="나눔고딕코딩"/>
-                <a:cs typeface="나눔고딕코딩"/>
+                <a:latin typeface="D2Coding"/>
+                <a:ea typeface="D2Coding"/>
+                <a:cs typeface="D2Coding"/>
               </a:rPr>
               <a:t>9</a:t>
             </a:r>
@@ -13372,9 +13372,9 @@
                 <a:solidFill>
                   <a:srgbClr val="E6EAF2"/>
                 </a:solidFill>
-                <a:latin typeface="나눔고딕코딩"/>
-                <a:ea typeface="나눔고딕코딩"/>
-                <a:cs typeface="나눔고딕코딩"/>
+                <a:latin typeface="D2Coding"/>
+                <a:ea typeface="D2Coding"/>
+                <a:cs typeface="D2Coding"/>
               </a:rPr>
               <a:t>SELECT name FROM employees</a:t>
             </a:r>
@@ -13390,9 +13390,9 @@
                 <a:solidFill>
                   <a:srgbClr val="E6EAF2"/>
                 </a:solidFill>
-                <a:latin typeface="나눔고딕코딩"/>
-                <a:ea typeface="나눔고딕코딩"/>
-                <a:cs typeface="나눔고딕코딩"/>
+                <a:latin typeface="D2Coding"/>
+                <a:ea typeface="D2Coding"/>
+                <a:cs typeface="D2Coding"/>
               </a:rPr>
               <a:t>WHERE  emp_id NOT IN (SELECT emp_id FROM orders);</a:t>
             </a:r>
@@ -13408,9 +13408,9 @@
                 <a:solidFill>
                   <a:srgbClr val="E6EAF2"/>
                 </a:solidFill>
-                <a:latin typeface="나눔고딕코딩"/>
-                <a:ea typeface="나눔고딕코딩"/>
-                <a:cs typeface="나눔고딕코딩"/>
+                <a:latin typeface="D2Coding"/>
+                <a:ea typeface="D2Coding"/>
+                <a:cs typeface="D2Coding"/>
               </a:rPr>
               <a:t/>
             </a:r>
@@ -13426,9 +13426,9 @@
                 <a:solidFill>
                   <a:srgbClr val="E6EAF2"/>
                 </a:solidFill>
-                <a:latin typeface="나눔고딕코딩"/>
-                <a:ea typeface="나눔고딕코딩"/>
-                <a:cs typeface="나눔고딕코딩"/>
+                <a:latin typeface="D2Coding"/>
+                <a:ea typeface="D2Coding"/>
+                <a:cs typeface="D2Coding"/>
               </a:rPr>
               <a:t>SELECT e.name</a:t>
             </a:r>
@@ -13444,9 +13444,9 @@
                 <a:solidFill>
                   <a:srgbClr val="E6EAF2"/>
                 </a:solidFill>
-                <a:latin typeface="나눔고딕코딩"/>
-                <a:ea typeface="나눔고딕코딩"/>
-                <a:cs typeface="나눔고딕코딩"/>
+                <a:latin typeface="D2Coding"/>
+                <a:ea typeface="D2Coding"/>
+                <a:cs typeface="D2Coding"/>
               </a:rPr>
               <a:t>FROM   employees e</a:t>
             </a:r>
@@ -13462,9 +13462,9 @@
                 <a:solidFill>
                   <a:srgbClr val="E6EAF2"/>
                 </a:solidFill>
-                <a:latin typeface="나눔고딕코딩"/>
-                <a:ea typeface="나눔고딕코딩"/>
-                <a:cs typeface="나눔고딕코딩"/>
+                <a:latin typeface="D2Coding"/>
+                <a:ea typeface="D2Coding"/>
+                <a:cs typeface="D2Coding"/>
               </a:rPr>
               <a:t>WHERE  NOT EXISTS (SELECT 1 FROM orders o WHERE o.emp_id = e.emp_id);</a:t>
             </a:r>
@@ -13480,9 +13480,9 @@
                 <a:solidFill>
                   <a:srgbClr val="E6EAF2"/>
                 </a:solidFill>
-                <a:latin typeface="나눔고딕코딩"/>
-                <a:ea typeface="나눔고딕코딩"/>
-                <a:cs typeface="나눔고딕코딩"/>
+                <a:latin typeface="D2Coding"/>
+                <a:ea typeface="D2Coding"/>
+                <a:cs typeface="D2Coding"/>
               </a:rPr>
               <a:t/>
             </a:r>
@@ -13498,9 +13498,9 @@
                 <a:solidFill>
                   <a:srgbClr val="E6EAF2"/>
                 </a:solidFill>
-                <a:latin typeface="나눔고딕코딩"/>
-                <a:ea typeface="나눔고딕코딩"/>
-                <a:cs typeface="나눔고딕코딩"/>
+                <a:latin typeface="D2Coding"/>
+                <a:ea typeface="D2Coding"/>
+                <a:cs typeface="D2Coding"/>
               </a:rPr>
               <a:t>SELECT name FROM employees</a:t>
             </a:r>
@@ -13516,9 +13516,9 @@
                 <a:solidFill>
                   <a:srgbClr val="E6EAF2"/>
                 </a:solidFill>
-                <a:latin typeface="나눔고딕코딩"/>
-                <a:ea typeface="나눔고딕코딩"/>
-                <a:cs typeface="나눔고딕코딩"/>
+                <a:latin typeface="D2Coding"/>
+                <a:ea typeface="D2Coding"/>
+                <a:cs typeface="D2Coding"/>
               </a:rPr>
               <a:t>WHERE  emp_id NOT IN (SELECT emp_id FROM orders WHERE emp_id IS NOT NULL);</a:t>
             </a:r>
@@ -15330,9 +15330,9 @@
                 <a:solidFill>
                   <a:srgbClr val="7A869C"/>
                 </a:solidFill>
-                <a:latin typeface="나눔고딕코딩"/>
-                <a:ea typeface="나눔고딕코딩"/>
-                <a:cs typeface="나눔고딕코딩"/>
+                <a:latin typeface="D2Coding"/>
+                <a:ea typeface="D2Coding"/>
+                <a:cs typeface="D2Coding"/>
               </a:rPr>
               <a:t>1</a:t>
             </a:r>
@@ -15348,9 +15348,9 @@
                 <a:solidFill>
                   <a:srgbClr val="7A869C"/>
                 </a:solidFill>
-                <a:latin typeface="나눔고딕코딩"/>
-                <a:ea typeface="나눔고딕코딩"/>
-                <a:cs typeface="나눔고딕코딩"/>
+                <a:latin typeface="D2Coding"/>
+                <a:ea typeface="D2Coding"/>
+                <a:cs typeface="D2Coding"/>
               </a:rPr>
               <a:t>2</a:t>
             </a:r>
@@ -15366,9 +15366,9 @@
                 <a:solidFill>
                   <a:srgbClr val="7A869C"/>
                 </a:solidFill>
-                <a:latin typeface="나눔고딕코딩"/>
-                <a:ea typeface="나눔고딕코딩"/>
-                <a:cs typeface="나눔고딕코딩"/>
+                <a:latin typeface="D2Coding"/>
+                <a:ea typeface="D2Coding"/>
+                <a:cs typeface="D2Coding"/>
               </a:rPr>
               <a:t>3</a:t>
             </a:r>
@@ -15384,9 +15384,9 @@
                 <a:solidFill>
                   <a:srgbClr val="7A869C"/>
                 </a:solidFill>
-                <a:latin typeface="나눔고딕코딩"/>
-                <a:ea typeface="나눔고딕코딩"/>
-                <a:cs typeface="나눔고딕코딩"/>
+                <a:latin typeface="D2Coding"/>
+                <a:ea typeface="D2Coding"/>
+                <a:cs typeface="D2Coding"/>
               </a:rPr>
               <a:t>4</a:t>
             </a:r>
@@ -15402,9 +15402,9 @@
                 <a:solidFill>
                   <a:srgbClr val="7A869C"/>
                 </a:solidFill>
-                <a:latin typeface="나눔고딕코딩"/>
-                <a:ea typeface="나눔고딕코딩"/>
-                <a:cs typeface="나눔고딕코딩"/>
+                <a:latin typeface="D2Coding"/>
+                <a:ea typeface="D2Coding"/>
+                <a:cs typeface="D2Coding"/>
               </a:rPr>
               <a:t>5</a:t>
             </a:r>
@@ -15420,9 +15420,9 @@
                 <a:solidFill>
                   <a:srgbClr val="7A869C"/>
                 </a:solidFill>
-                <a:latin typeface="나눔고딕코딩"/>
-                <a:ea typeface="나눔고딕코딩"/>
-                <a:cs typeface="나눔고딕코딩"/>
+                <a:latin typeface="D2Coding"/>
+                <a:ea typeface="D2Coding"/>
+                <a:cs typeface="D2Coding"/>
               </a:rPr>
               <a:t>6</a:t>
             </a:r>
@@ -15438,9 +15438,9 @@
                 <a:solidFill>
                   <a:srgbClr val="7A869C"/>
                 </a:solidFill>
-                <a:latin typeface="나눔고딕코딩"/>
-                <a:ea typeface="나눔고딕코딩"/>
-                <a:cs typeface="나눔고딕코딩"/>
+                <a:latin typeface="D2Coding"/>
+                <a:ea typeface="D2Coding"/>
+                <a:cs typeface="D2Coding"/>
               </a:rPr>
               <a:t>7</a:t>
             </a:r>
@@ -15456,9 +15456,9 @@
                 <a:solidFill>
                   <a:srgbClr val="7A869C"/>
                 </a:solidFill>
-                <a:latin typeface="나눔고딕코딩"/>
-                <a:ea typeface="나눔고딕코딩"/>
-                <a:cs typeface="나눔고딕코딩"/>
+                <a:latin typeface="D2Coding"/>
+                <a:ea typeface="D2Coding"/>
+                <a:cs typeface="D2Coding"/>
               </a:rPr>
               <a:t>8</a:t>
             </a:r>
@@ -15474,9 +15474,9 @@
                 <a:solidFill>
                   <a:srgbClr val="7A869C"/>
                 </a:solidFill>
-                <a:latin typeface="나눔고딕코딩"/>
-                <a:ea typeface="나눔고딕코딩"/>
-                <a:cs typeface="나눔고딕코딩"/>
+                <a:latin typeface="D2Coding"/>
+                <a:ea typeface="D2Coding"/>
+                <a:cs typeface="D2Coding"/>
               </a:rPr>
               <a:t>9</a:t>
             </a:r>
@@ -15492,9 +15492,9 @@
                 <a:solidFill>
                   <a:srgbClr val="7A869C"/>
                 </a:solidFill>
-                <a:latin typeface="나눔고딕코딩"/>
-                <a:ea typeface="나눔고딕코딩"/>
-                <a:cs typeface="나눔고딕코딩"/>
+                <a:latin typeface="D2Coding"/>
+                <a:ea typeface="D2Coding"/>
+                <a:cs typeface="D2Coding"/>
               </a:rPr>
               <a:t>10</a:t>
             </a:r>
@@ -15510,9 +15510,9 @@
                 <a:solidFill>
                   <a:srgbClr val="7A869C"/>
                 </a:solidFill>
-                <a:latin typeface="나눔고딕코딩"/>
-                <a:ea typeface="나눔고딕코딩"/>
-                <a:cs typeface="나눔고딕코딩"/>
+                <a:latin typeface="D2Coding"/>
+                <a:ea typeface="D2Coding"/>
+                <a:cs typeface="D2Coding"/>
               </a:rPr>
               <a:t>11</a:t>
             </a:r>
@@ -15528,9 +15528,9 @@
                 <a:solidFill>
                   <a:srgbClr val="7A869C"/>
                 </a:solidFill>
-                <a:latin typeface="나눔고딕코딩"/>
-                <a:ea typeface="나눔고딕코딩"/>
-                <a:cs typeface="나눔고딕코딩"/>
+                <a:latin typeface="D2Coding"/>
+                <a:ea typeface="D2Coding"/>
+                <a:cs typeface="D2Coding"/>
               </a:rPr>
               <a:t>12</a:t>
             </a:r>
@@ -15546,9 +15546,9 @@
                 <a:solidFill>
                   <a:srgbClr val="7A869C"/>
                 </a:solidFill>
-                <a:latin typeface="나눔고딕코딩"/>
-                <a:ea typeface="나눔고딕코딩"/>
-                <a:cs typeface="나눔고딕코딩"/>
+                <a:latin typeface="D2Coding"/>
+                <a:ea typeface="D2Coding"/>
+                <a:cs typeface="D2Coding"/>
               </a:rPr>
               <a:t>13</a:t>
             </a:r>
@@ -15587,9 +15587,9 @@
                 <a:solidFill>
                   <a:srgbClr val="E6EAF2"/>
                 </a:solidFill>
-                <a:latin typeface="나눔고딕코딩"/>
-                <a:ea typeface="나눔고딕코딩"/>
-                <a:cs typeface="나눔고딕코딩"/>
+                <a:latin typeface="D2Coding"/>
+                <a:ea typeface="D2Coding"/>
+                <a:cs typeface="D2Coding"/>
               </a:rPr>
               <a:t>SELECT t.order_id, t.결제금액</a:t>
             </a:r>
@@ -15605,9 +15605,9 @@
                 <a:solidFill>
                   <a:srgbClr val="E6EAF2"/>
                 </a:solidFill>
-                <a:latin typeface="나눔고딕코딩"/>
-                <a:ea typeface="나눔고딕코딩"/>
-                <a:cs typeface="나눔고딕코딩"/>
+                <a:latin typeface="D2Coding"/>
+                <a:ea typeface="D2Coding"/>
+                <a:cs typeface="D2Coding"/>
               </a:rPr>
               <a:t>FROM (</a:t>
             </a:r>
@@ -15623,9 +15623,9 @@
                 <a:solidFill>
                   <a:srgbClr val="E6EAF2"/>
                 </a:solidFill>
-                <a:latin typeface="나눔고딕코딩"/>
-                <a:ea typeface="나눔고딕코딩"/>
-                <a:cs typeface="나눔고딕코딩"/>
+                <a:latin typeface="D2Coding"/>
+                <a:ea typeface="D2Coding"/>
+                <a:cs typeface="D2Coding"/>
               </a:rPr>
               <a:t>  SELECT order_id, SUM(qty * unit_price) AS 결제금액</a:t>
             </a:r>
@@ -15641,9 +15641,9 @@
                 <a:solidFill>
                   <a:srgbClr val="E6EAF2"/>
                 </a:solidFill>
-                <a:latin typeface="나눔고딕코딩"/>
-                <a:ea typeface="나눔고딕코딩"/>
-                <a:cs typeface="나눔고딕코딩"/>
+                <a:latin typeface="D2Coding"/>
+                <a:ea typeface="D2Coding"/>
+                <a:cs typeface="D2Coding"/>
               </a:rPr>
               <a:t>  FROM   order_items</a:t>
             </a:r>
@@ -15659,9 +15659,9 @@
                 <a:solidFill>
                   <a:srgbClr val="E6EAF2"/>
                 </a:solidFill>
-                <a:latin typeface="나눔고딕코딩"/>
-                <a:ea typeface="나눔고딕코딩"/>
-                <a:cs typeface="나눔고딕코딩"/>
+                <a:latin typeface="D2Coding"/>
+                <a:ea typeface="D2Coding"/>
+                <a:cs typeface="D2Coding"/>
               </a:rPr>
               <a:t>  GROUP  BY order_id</a:t>
             </a:r>
@@ -15677,9 +15677,9 @@
                 <a:solidFill>
                   <a:srgbClr val="E6EAF2"/>
                 </a:solidFill>
-                <a:latin typeface="나눔고딕코딩"/>
-                <a:ea typeface="나눔고딕코딩"/>
-                <a:cs typeface="나눔고딕코딩"/>
+                <a:latin typeface="D2Coding"/>
+                <a:ea typeface="D2Coding"/>
+                <a:cs typeface="D2Coding"/>
               </a:rPr>
               <a:t>) AS t</a:t>
             </a:r>
@@ -15695,9 +15695,9 @@
                 <a:solidFill>
                   <a:srgbClr val="E6EAF2"/>
                 </a:solidFill>
-                <a:latin typeface="나눔고딕코딩"/>
-                <a:ea typeface="나눔고딕코딩"/>
-                <a:cs typeface="나눔고딕코딩"/>
+                <a:latin typeface="D2Coding"/>
+                <a:ea typeface="D2Coding"/>
+                <a:cs typeface="D2Coding"/>
               </a:rPr>
               <a:t>WHERE t.결제금액 &gt; (</a:t>
             </a:r>
@@ -15713,9 +15713,9 @@
                 <a:solidFill>
                   <a:srgbClr val="E6EAF2"/>
                 </a:solidFill>
-                <a:latin typeface="나눔고딕코딩"/>
-                <a:ea typeface="나눔고딕코딩"/>
-                <a:cs typeface="나눔고딕코딩"/>
+                <a:latin typeface="D2Coding"/>
+                <a:ea typeface="D2Coding"/>
+                <a:cs typeface="D2Coding"/>
               </a:rPr>
               <a:t>  SELECT AVG(총액) FROM (</a:t>
             </a:r>
@@ -15731,9 +15731,9 @@
                 <a:solidFill>
                   <a:srgbClr val="E6EAF2"/>
                 </a:solidFill>
-                <a:latin typeface="나눔고딕코딩"/>
-                <a:ea typeface="나눔고딕코딩"/>
-                <a:cs typeface="나눔고딕코딩"/>
+                <a:latin typeface="D2Coding"/>
+                <a:ea typeface="D2Coding"/>
+                <a:cs typeface="D2Coding"/>
               </a:rPr>
               <a:t>    SELECT SUM(qty * unit_price) AS 총액</a:t>
             </a:r>
@@ -15749,9 +15749,9 @@
                 <a:solidFill>
                   <a:srgbClr val="E6EAF2"/>
                 </a:solidFill>
-                <a:latin typeface="나눔고딕코딩"/>
-                <a:ea typeface="나눔고딕코딩"/>
-                <a:cs typeface="나눔고딕코딩"/>
+                <a:latin typeface="D2Coding"/>
+                <a:ea typeface="D2Coding"/>
+                <a:cs typeface="D2Coding"/>
               </a:rPr>
               <a:t>    FROM   order_items</a:t>
             </a:r>
@@ -15767,9 +15767,9 @@
                 <a:solidFill>
                   <a:srgbClr val="E6EAF2"/>
                 </a:solidFill>
-                <a:latin typeface="나눔고딕코딩"/>
-                <a:ea typeface="나눔고딕코딩"/>
-                <a:cs typeface="나눔고딕코딩"/>
+                <a:latin typeface="D2Coding"/>
+                <a:ea typeface="D2Coding"/>
+                <a:cs typeface="D2Coding"/>
               </a:rPr>
               <a:t>    GROUP  BY order_id</a:t>
             </a:r>
@@ -15785,9 +15785,9 @@
                 <a:solidFill>
                   <a:srgbClr val="E6EAF2"/>
                 </a:solidFill>
-                <a:latin typeface="나눔고딕코딩"/>
-                <a:ea typeface="나눔고딕코딩"/>
-                <a:cs typeface="나눔고딕코딩"/>
+                <a:latin typeface="D2Coding"/>
+                <a:ea typeface="D2Coding"/>
+                <a:cs typeface="D2Coding"/>
               </a:rPr>
               <a:t>  ) AS s</a:t>
             </a:r>
@@ -15803,9 +15803,9 @@
                 <a:solidFill>
                   <a:srgbClr val="E6EAF2"/>
                 </a:solidFill>
-                <a:latin typeface="나눔고딕코딩"/>
-                <a:ea typeface="나눔고딕코딩"/>
-                <a:cs typeface="나눔고딕코딩"/>
+                <a:latin typeface="D2Coding"/>
+                <a:ea typeface="D2Coding"/>
+                <a:cs typeface="D2Coding"/>
               </a:rPr>
               <a:t>);</a:t>
             </a:r>
@@ -22575,9 +22575,9 @@
                 <a:solidFill>
                   <a:srgbClr val="7A869C"/>
                 </a:solidFill>
-                <a:latin typeface="나눔고딕코딩"/>
-                <a:ea typeface="나눔고딕코딩"/>
-                <a:cs typeface="나눔고딕코딩"/>
+                <a:latin typeface="D2Coding"/>
+                <a:ea typeface="D2Coding"/>
+                <a:cs typeface="D2Coding"/>
               </a:rPr>
               <a:t>1</a:t>
             </a:r>
@@ -22593,9 +22593,9 @@
                 <a:solidFill>
                   <a:srgbClr val="7A869C"/>
                 </a:solidFill>
-                <a:latin typeface="나눔고딕코딩"/>
-                <a:ea typeface="나눔고딕코딩"/>
-                <a:cs typeface="나눔고딕코딩"/>
+                <a:latin typeface="D2Coding"/>
+                <a:ea typeface="D2Coding"/>
+                <a:cs typeface="D2Coding"/>
               </a:rPr>
               <a:t>2</a:t>
             </a:r>
@@ -22611,9 +22611,9 @@
                 <a:solidFill>
                   <a:srgbClr val="7A869C"/>
                 </a:solidFill>
-                <a:latin typeface="나눔고딕코딩"/>
-                <a:ea typeface="나눔고딕코딩"/>
-                <a:cs typeface="나눔고딕코딩"/>
+                <a:latin typeface="D2Coding"/>
+                <a:ea typeface="D2Coding"/>
+                <a:cs typeface="D2Coding"/>
               </a:rPr>
               <a:t>3</a:t>
             </a:r>
@@ -22629,9 +22629,9 @@
                 <a:solidFill>
                   <a:srgbClr val="7A869C"/>
                 </a:solidFill>
-                <a:latin typeface="나눔고딕코딩"/>
-                <a:ea typeface="나눔고딕코딩"/>
-                <a:cs typeface="나눔고딕코딩"/>
+                <a:latin typeface="D2Coding"/>
+                <a:ea typeface="D2Coding"/>
+                <a:cs typeface="D2Coding"/>
               </a:rPr>
               <a:t>4</a:t>
             </a:r>
@@ -22647,9 +22647,9 @@
                 <a:solidFill>
                   <a:srgbClr val="7A869C"/>
                 </a:solidFill>
-                <a:latin typeface="나눔고딕코딩"/>
-                <a:ea typeface="나눔고딕코딩"/>
-                <a:cs typeface="나눔고딕코딩"/>
+                <a:latin typeface="D2Coding"/>
+                <a:ea typeface="D2Coding"/>
+                <a:cs typeface="D2Coding"/>
               </a:rPr>
               <a:t>5</a:t>
             </a:r>
@@ -22665,9 +22665,9 @@
                 <a:solidFill>
                   <a:srgbClr val="7A869C"/>
                 </a:solidFill>
-                <a:latin typeface="나눔고딕코딩"/>
-                <a:ea typeface="나눔고딕코딩"/>
-                <a:cs typeface="나눔고딕코딩"/>
+                <a:latin typeface="D2Coding"/>
+                <a:ea typeface="D2Coding"/>
+                <a:cs typeface="D2Coding"/>
               </a:rPr>
               <a:t>6</a:t>
             </a:r>
@@ -22683,9 +22683,9 @@
                 <a:solidFill>
                   <a:srgbClr val="7A869C"/>
                 </a:solidFill>
-                <a:latin typeface="나눔고딕코딩"/>
-                <a:ea typeface="나눔고딕코딩"/>
-                <a:cs typeface="나눔고딕코딩"/>
+                <a:latin typeface="D2Coding"/>
+                <a:ea typeface="D2Coding"/>
+                <a:cs typeface="D2Coding"/>
               </a:rPr>
               <a:t>7</a:t>
             </a:r>
@@ -22724,9 +22724,9 @@
                 <a:solidFill>
                   <a:srgbClr val="E6EAF2"/>
                 </a:solidFill>
-                <a:latin typeface="나눔고딕코딩"/>
-                <a:ea typeface="나눔고딕코딩"/>
-                <a:cs typeface="나눔고딕코딩"/>
+                <a:latin typeface="D2Coding"/>
+                <a:ea typeface="D2Coding"/>
+                <a:cs typeface="D2Coding"/>
               </a:rPr>
               <a:t>SELECT cust_id, name FROM customers WHERE grade = 'VIP'</a:t>
             </a:r>
@@ -22742,9 +22742,9 @@
                 <a:solidFill>
                   <a:srgbClr val="E6EAF2"/>
                 </a:solidFill>
-                <a:latin typeface="나눔고딕코딩"/>
-                <a:ea typeface="나눔고딕코딩"/>
-                <a:cs typeface="나눔고딕코딩"/>
+                <a:latin typeface="D2Coding"/>
+                <a:ea typeface="D2Coding"/>
+                <a:cs typeface="D2Coding"/>
               </a:rPr>
               <a:t>UNION</a:t>
             </a:r>
@@ -22760,9 +22760,9 @@
                 <a:solidFill>
                   <a:srgbClr val="E6EAF2"/>
                 </a:solidFill>
-                <a:latin typeface="나눔고딕코딩"/>
-                <a:ea typeface="나눔고딕코딩"/>
-                <a:cs typeface="나눔고딕코딩"/>
+                <a:latin typeface="D2Coding"/>
+                <a:ea typeface="D2Coding"/>
+                <a:cs typeface="D2Coding"/>
               </a:rPr>
               <a:t>SELECT cust_id, name FROM customers WHERE city = '서울';</a:t>
             </a:r>
@@ -22778,9 +22778,9 @@
                 <a:solidFill>
                   <a:srgbClr val="E6EAF2"/>
                 </a:solidFill>
-                <a:latin typeface="나눔고딕코딩"/>
-                <a:ea typeface="나눔고딕코딩"/>
-                <a:cs typeface="나눔고딕코딩"/>
+                <a:latin typeface="D2Coding"/>
+                <a:ea typeface="D2Coding"/>
+                <a:cs typeface="D2Coding"/>
               </a:rPr>
               <a:t/>
             </a:r>
@@ -22796,9 +22796,9 @@
                 <a:solidFill>
                   <a:srgbClr val="E6EAF2"/>
                 </a:solidFill>
-                <a:latin typeface="나눔고딕코딩"/>
-                <a:ea typeface="나눔고딕코딩"/>
-                <a:cs typeface="나눔고딕코딩"/>
+                <a:latin typeface="D2Coding"/>
+                <a:ea typeface="D2Coding"/>
+                <a:cs typeface="D2Coding"/>
               </a:rPr>
               <a:t>SELECT cust_id, name FROM customers WHERE grade = 'VIP'</a:t>
             </a:r>
@@ -22814,9 +22814,9 @@
                 <a:solidFill>
                   <a:srgbClr val="E6EAF2"/>
                 </a:solidFill>
-                <a:latin typeface="나눔고딕코딩"/>
-                <a:ea typeface="나눔고딕코딩"/>
-                <a:cs typeface="나눔고딕코딩"/>
+                <a:latin typeface="D2Coding"/>
+                <a:ea typeface="D2Coding"/>
+                <a:cs typeface="D2Coding"/>
               </a:rPr>
               <a:t>UNION ALL</a:t>
             </a:r>
@@ -22832,9 +22832,9 @@
                 <a:solidFill>
                   <a:srgbClr val="E6EAF2"/>
                 </a:solidFill>
-                <a:latin typeface="나눔고딕코딩"/>
-                <a:ea typeface="나눔고딕코딩"/>
-                <a:cs typeface="나눔고딕코딩"/>
+                <a:latin typeface="D2Coding"/>
+                <a:ea typeface="D2Coding"/>
+                <a:cs typeface="D2Coding"/>
               </a:rPr>
               <a:t>SELECT cust_id, name FROM customers WHERE city = '서울';</a:t>
             </a:r>
@@ -24210,9 +24210,9 @@
                 <a:solidFill>
                   <a:srgbClr val="7A869C"/>
                 </a:solidFill>
-                <a:latin typeface="나눔고딕코딩"/>
-                <a:ea typeface="나눔고딕코딩"/>
-                <a:cs typeface="나눔고딕코딩"/>
+                <a:latin typeface="D2Coding"/>
+                <a:ea typeface="D2Coding"/>
+                <a:cs typeface="D2Coding"/>
               </a:rPr>
               <a:t>1</a:t>
             </a:r>
@@ -24228,9 +24228,9 @@
                 <a:solidFill>
                   <a:srgbClr val="7A869C"/>
                 </a:solidFill>
-                <a:latin typeface="나눔고딕코딩"/>
-                <a:ea typeface="나눔고딕코딩"/>
-                <a:cs typeface="나눔고딕코딩"/>
+                <a:latin typeface="D2Coding"/>
+                <a:ea typeface="D2Coding"/>
+                <a:cs typeface="D2Coding"/>
               </a:rPr>
               <a:t>2</a:t>
             </a:r>
@@ -24246,9 +24246,9 @@
                 <a:solidFill>
                   <a:srgbClr val="7A869C"/>
                 </a:solidFill>
-                <a:latin typeface="나눔고딕코딩"/>
-                <a:ea typeface="나눔고딕코딩"/>
-                <a:cs typeface="나눔고딕코딩"/>
+                <a:latin typeface="D2Coding"/>
+                <a:ea typeface="D2Coding"/>
+                <a:cs typeface="D2Coding"/>
               </a:rPr>
               <a:t>3</a:t>
             </a:r>
@@ -24264,9 +24264,9 @@
                 <a:solidFill>
                   <a:srgbClr val="7A869C"/>
                 </a:solidFill>
-                <a:latin typeface="나눔고딕코딩"/>
-                <a:ea typeface="나눔고딕코딩"/>
-                <a:cs typeface="나눔고딕코딩"/>
+                <a:latin typeface="D2Coding"/>
+                <a:ea typeface="D2Coding"/>
+                <a:cs typeface="D2Coding"/>
               </a:rPr>
               <a:t>4</a:t>
             </a:r>
@@ -24282,9 +24282,9 @@
                 <a:solidFill>
                   <a:srgbClr val="7A869C"/>
                 </a:solidFill>
-                <a:latin typeface="나눔고딕코딩"/>
-                <a:ea typeface="나눔고딕코딩"/>
-                <a:cs typeface="나눔고딕코딩"/>
+                <a:latin typeface="D2Coding"/>
+                <a:ea typeface="D2Coding"/>
+                <a:cs typeface="D2Coding"/>
               </a:rPr>
               <a:t>5</a:t>
             </a:r>
@@ -24300,9 +24300,9 @@
                 <a:solidFill>
                   <a:srgbClr val="7A869C"/>
                 </a:solidFill>
-                <a:latin typeface="나눔고딕코딩"/>
-                <a:ea typeface="나눔고딕코딩"/>
-                <a:cs typeface="나눔고딕코딩"/>
+                <a:latin typeface="D2Coding"/>
+                <a:ea typeface="D2Coding"/>
+                <a:cs typeface="D2Coding"/>
               </a:rPr>
               <a:t>6</a:t>
             </a:r>
@@ -24341,9 +24341,9 @@
                 <a:solidFill>
                   <a:srgbClr val="E6EAF2"/>
                 </a:solidFill>
-                <a:latin typeface="나눔고딕코딩"/>
-                <a:ea typeface="나눔고딕코딩"/>
-                <a:cs typeface="나눔고딕코딩"/>
+                <a:latin typeface="D2Coding"/>
+                <a:ea typeface="D2Coding"/>
+                <a:cs typeface="D2Coding"/>
               </a:rPr>
               <a:t>SELECT order_id, order_date, '온라인' AS 채널</a:t>
             </a:r>
@@ -24359,9 +24359,9 @@
                 <a:solidFill>
                   <a:srgbClr val="E6EAF2"/>
                 </a:solidFill>
-                <a:latin typeface="나눔고딕코딩"/>
-                <a:ea typeface="나눔고딕코딩"/>
-                <a:cs typeface="나눔고딕코딩"/>
+                <a:latin typeface="D2Coding"/>
+                <a:ea typeface="D2Coding"/>
+                <a:cs typeface="D2Coding"/>
               </a:rPr>
               <a:t>FROM   orders WHERE emp_id IS NULL</a:t>
             </a:r>
@@ -24377,9 +24377,9 @@
                 <a:solidFill>
                   <a:srgbClr val="E6EAF2"/>
                 </a:solidFill>
-                <a:latin typeface="나눔고딕코딩"/>
-                <a:ea typeface="나눔고딕코딩"/>
-                <a:cs typeface="나눔고딕코딩"/>
+                <a:latin typeface="D2Coding"/>
+                <a:ea typeface="D2Coding"/>
+                <a:cs typeface="D2Coding"/>
               </a:rPr>
               <a:t>UNION ALL</a:t>
             </a:r>
@@ -24395,9 +24395,9 @@
                 <a:solidFill>
                   <a:srgbClr val="E6EAF2"/>
                 </a:solidFill>
-                <a:latin typeface="나눔고딕코딩"/>
-                <a:ea typeface="나눔고딕코딩"/>
-                <a:cs typeface="나눔고딕코딩"/>
+                <a:latin typeface="D2Coding"/>
+                <a:ea typeface="D2Coding"/>
+                <a:cs typeface="D2Coding"/>
               </a:rPr>
               <a:t>SELECT order_id, order_date, '오프라인'</a:t>
             </a:r>
@@ -24413,9 +24413,9 @@
                 <a:solidFill>
                   <a:srgbClr val="E6EAF2"/>
                 </a:solidFill>
-                <a:latin typeface="나눔고딕코딩"/>
-                <a:ea typeface="나눔고딕코딩"/>
-                <a:cs typeface="나눔고딕코딩"/>
+                <a:latin typeface="D2Coding"/>
+                <a:ea typeface="D2Coding"/>
+                <a:cs typeface="D2Coding"/>
               </a:rPr>
               <a:t>FROM   orders WHERE emp_id IS NOT NULL</a:t>
             </a:r>
@@ -24431,9 +24431,9 @@
                 <a:solidFill>
                   <a:srgbClr val="E6EAF2"/>
                 </a:solidFill>
-                <a:latin typeface="나눔고딕코딩"/>
-                <a:ea typeface="나눔고딕코딩"/>
-                <a:cs typeface="나눔고딕코딩"/>
+                <a:latin typeface="D2Coding"/>
+                <a:ea typeface="D2Coding"/>
+                <a:cs typeface="D2Coding"/>
               </a:rPr>
               <a:t>ORDER  BY order_date;</a:t>
             </a:r>
@@ -40479,9 +40479,9 @@
                 <a:solidFill>
                   <a:srgbClr val="7A869C"/>
                 </a:solidFill>
-                <a:latin typeface="나눔고딕코딩"/>
-                <a:ea typeface="나눔고딕코딩"/>
-                <a:cs typeface="나눔고딕코딩"/>
+                <a:latin typeface="D2Coding"/>
+                <a:ea typeface="D2Coding"/>
+                <a:cs typeface="D2Coding"/>
               </a:rPr>
               <a:t>1</a:t>
             </a:r>
@@ -40497,9 +40497,9 @@
                 <a:solidFill>
                   <a:srgbClr val="7A869C"/>
                 </a:solidFill>
-                <a:latin typeface="나눔고딕코딩"/>
-                <a:ea typeface="나눔고딕코딩"/>
-                <a:cs typeface="나눔고딕코딩"/>
+                <a:latin typeface="D2Coding"/>
+                <a:ea typeface="D2Coding"/>
+                <a:cs typeface="D2Coding"/>
               </a:rPr>
               <a:t>2</a:t>
             </a:r>
@@ -40515,9 +40515,9 @@
                 <a:solidFill>
                   <a:srgbClr val="7A869C"/>
                 </a:solidFill>
-                <a:latin typeface="나눔고딕코딩"/>
-                <a:ea typeface="나눔고딕코딩"/>
-                <a:cs typeface="나눔고딕코딩"/>
+                <a:latin typeface="D2Coding"/>
+                <a:ea typeface="D2Coding"/>
+                <a:cs typeface="D2Coding"/>
               </a:rPr>
               <a:t>3</a:t>
             </a:r>
@@ -40533,9 +40533,9 @@
                 <a:solidFill>
                   <a:srgbClr val="7A869C"/>
                 </a:solidFill>
-                <a:latin typeface="나눔고딕코딩"/>
-                <a:ea typeface="나눔고딕코딩"/>
-                <a:cs typeface="나눔고딕코딩"/>
+                <a:latin typeface="D2Coding"/>
+                <a:ea typeface="D2Coding"/>
+                <a:cs typeface="D2Coding"/>
               </a:rPr>
               <a:t>4</a:t>
             </a:r>
@@ -40551,9 +40551,9 @@
                 <a:solidFill>
                   <a:srgbClr val="7A869C"/>
                 </a:solidFill>
-                <a:latin typeface="나눔고딕코딩"/>
-                <a:ea typeface="나눔고딕코딩"/>
-                <a:cs typeface="나눔고딕코딩"/>
+                <a:latin typeface="D2Coding"/>
+                <a:ea typeface="D2Coding"/>
+                <a:cs typeface="D2Coding"/>
               </a:rPr>
               <a:t>5</a:t>
             </a:r>
@@ -40569,9 +40569,9 @@
                 <a:solidFill>
                   <a:srgbClr val="7A869C"/>
                 </a:solidFill>
-                <a:latin typeface="나눔고딕코딩"/>
-                <a:ea typeface="나눔고딕코딩"/>
-                <a:cs typeface="나눔고딕코딩"/>
+                <a:latin typeface="D2Coding"/>
+                <a:ea typeface="D2Coding"/>
+                <a:cs typeface="D2Coding"/>
               </a:rPr>
               <a:t>6</a:t>
             </a:r>
@@ -40587,9 +40587,9 @@
                 <a:solidFill>
                   <a:srgbClr val="7A869C"/>
                 </a:solidFill>
-                <a:latin typeface="나눔고딕코딩"/>
-                <a:ea typeface="나눔고딕코딩"/>
-                <a:cs typeface="나눔고딕코딩"/>
+                <a:latin typeface="D2Coding"/>
+                <a:ea typeface="D2Coding"/>
+                <a:cs typeface="D2Coding"/>
               </a:rPr>
               <a:t>7</a:t>
             </a:r>
@@ -40605,9 +40605,9 @@
                 <a:solidFill>
                   <a:srgbClr val="7A869C"/>
                 </a:solidFill>
-                <a:latin typeface="나눔고딕코딩"/>
-                <a:ea typeface="나눔고딕코딩"/>
-                <a:cs typeface="나눔고딕코딩"/>
+                <a:latin typeface="D2Coding"/>
+                <a:ea typeface="D2Coding"/>
+                <a:cs typeface="D2Coding"/>
               </a:rPr>
               <a:t>8</a:t>
             </a:r>
@@ -40623,9 +40623,9 @@
                 <a:solidFill>
                   <a:srgbClr val="7A869C"/>
                 </a:solidFill>
-                <a:latin typeface="나눔고딕코딩"/>
-                <a:ea typeface="나눔고딕코딩"/>
-                <a:cs typeface="나눔고딕코딩"/>
+                <a:latin typeface="D2Coding"/>
+                <a:ea typeface="D2Coding"/>
+                <a:cs typeface="D2Coding"/>
               </a:rPr>
               <a:t>9</a:t>
             </a:r>
@@ -40641,9 +40641,9 @@
                 <a:solidFill>
                   <a:srgbClr val="7A869C"/>
                 </a:solidFill>
-                <a:latin typeface="나눔고딕코딩"/>
-                <a:ea typeface="나눔고딕코딩"/>
-                <a:cs typeface="나눔고딕코딩"/>
+                <a:latin typeface="D2Coding"/>
+                <a:ea typeface="D2Coding"/>
+                <a:cs typeface="D2Coding"/>
               </a:rPr>
               <a:t>10</a:t>
             </a:r>
@@ -40682,9 +40682,9 @@
                 <a:solidFill>
                   <a:srgbClr val="E6EAF2"/>
                 </a:solidFill>
-                <a:latin typeface="나눔고딕코딩"/>
-                <a:ea typeface="나눔고딕코딩"/>
-                <a:cs typeface="나눔고딕코딩"/>
+                <a:latin typeface="D2Coding"/>
+                <a:ea typeface="D2Coding"/>
+                <a:cs typeface="D2Coding"/>
               </a:rPr>
               <a:t>SELECT name, price</a:t>
             </a:r>
@@ -40700,9 +40700,9 @@
                 <a:solidFill>
                   <a:srgbClr val="E6EAF2"/>
                 </a:solidFill>
-                <a:latin typeface="나눔고딕코딩"/>
-                <a:ea typeface="나눔고딕코딩"/>
-                <a:cs typeface="나눔고딕코딩"/>
+                <a:latin typeface="D2Coding"/>
+                <a:ea typeface="D2Coding"/>
+                <a:cs typeface="D2Coding"/>
               </a:rPr>
               <a:t>FROM   products</a:t>
             </a:r>
@@ -40718,9 +40718,9 @@
                 <a:solidFill>
                   <a:srgbClr val="E6EAF2"/>
                 </a:solidFill>
-                <a:latin typeface="나눔고딕코딩"/>
-                <a:ea typeface="나눔고딕코딩"/>
-                <a:cs typeface="나눔고딕코딩"/>
+                <a:latin typeface="D2Coding"/>
+                <a:ea typeface="D2Coding"/>
+                <a:cs typeface="D2Coding"/>
               </a:rPr>
               <a:t>WHERE  price &gt; (SELECT AVG(price) FROM products);</a:t>
             </a:r>
@@ -40736,9 +40736,9 @@
                 <a:solidFill>
                   <a:srgbClr val="E6EAF2"/>
                 </a:solidFill>
-                <a:latin typeface="나눔고딕코딩"/>
-                <a:ea typeface="나눔고딕코딩"/>
-                <a:cs typeface="나눔고딕코딩"/>
+                <a:latin typeface="D2Coding"/>
+                <a:ea typeface="D2Coding"/>
+                <a:cs typeface="D2Coding"/>
               </a:rPr>
               <a:t/>
             </a:r>
@@ -40754,9 +40754,9 @@
                 <a:solidFill>
                   <a:srgbClr val="E6EAF2"/>
                 </a:solidFill>
-                <a:latin typeface="나눔고딕코딩"/>
-                <a:ea typeface="나눔고딕코딩"/>
-                <a:cs typeface="나눔고딕코딩"/>
+                <a:latin typeface="D2Coding"/>
+                <a:ea typeface="D2Coding"/>
+                <a:cs typeface="D2Coding"/>
               </a:rPr>
               <a:t>SELECT name,</a:t>
             </a:r>
@@ -40772,9 +40772,9 @@
                 <a:solidFill>
                   <a:srgbClr val="E6EAF2"/>
                 </a:solidFill>
-                <a:latin typeface="나눔고딕코딩"/>
-                <a:ea typeface="나눔고딕코딩"/>
-                <a:cs typeface="나눔고딕코딩"/>
+                <a:latin typeface="D2Coding"/>
+                <a:ea typeface="D2Coding"/>
+                <a:cs typeface="D2Coding"/>
               </a:rPr>
               <a:t>       price,</a:t>
             </a:r>
@@ -40790,9 +40790,9 @@
                 <a:solidFill>
                   <a:srgbClr val="E6EAF2"/>
                 </a:solidFill>
-                <a:latin typeface="나눔고딕코딩"/>
-                <a:ea typeface="나눔고딕코딩"/>
-                <a:cs typeface="나눔고딕코딩"/>
+                <a:latin typeface="D2Coding"/>
+                <a:ea typeface="D2Coding"/>
+                <a:cs typeface="D2Coding"/>
               </a:rPr>
               <a:t>       (SELECT ROUND(AVG(price)) FROM products)         AS 전체평균,</a:t>
             </a:r>
@@ -40808,9 +40808,9 @@
                 <a:solidFill>
                   <a:srgbClr val="E6EAF2"/>
                 </a:solidFill>
-                <a:latin typeface="나눔고딕코딩"/>
-                <a:ea typeface="나눔고딕코딩"/>
-                <a:cs typeface="나눔고딕코딩"/>
+                <a:latin typeface="D2Coding"/>
+                <a:ea typeface="D2Coding"/>
+                <a:cs typeface="D2Coding"/>
               </a:rPr>
               <a:t>       price - (SELECT ROUND(AVG(price)) FROM products) AS 차이</a:t>
             </a:r>
@@ -40826,9 +40826,9 @@
                 <a:solidFill>
                   <a:srgbClr val="E6EAF2"/>
                 </a:solidFill>
-                <a:latin typeface="나눔고딕코딩"/>
-                <a:ea typeface="나눔고딕코딩"/>
-                <a:cs typeface="나눔고딕코딩"/>
+                <a:latin typeface="D2Coding"/>
+                <a:ea typeface="D2Coding"/>
+                <a:cs typeface="D2Coding"/>
               </a:rPr>
               <a:t>FROM   products</a:t>
             </a:r>
@@ -40844,9 +40844,9 @@
                 <a:solidFill>
                   <a:srgbClr val="E6EAF2"/>
                 </a:solidFill>
-                <a:latin typeface="나눔고딕코딩"/>
-                <a:ea typeface="나눔고딕코딩"/>
-                <a:cs typeface="나눔고딕코딩"/>
+                <a:latin typeface="D2Coding"/>
+                <a:ea typeface="D2Coding"/>
+                <a:cs typeface="D2Coding"/>
               </a:rPr>
               <a:t>WHERE  price &gt; (SELECT AVG(price) FROM products);</a:t>
             </a:r>
@@ -43752,9 +43752,9 @@
                 <a:solidFill>
                   <a:srgbClr val="7A869C"/>
                 </a:solidFill>
-                <a:latin typeface="나눔고딕코딩"/>
-                <a:ea typeface="나눔고딕코딩"/>
-                <a:cs typeface="나눔고딕코딩"/>
+                <a:latin typeface="D2Coding"/>
+                <a:ea typeface="D2Coding"/>
+                <a:cs typeface="D2Coding"/>
               </a:rPr>
               <a:t>1</a:t>
             </a:r>
@@ -43770,9 +43770,9 @@
                 <a:solidFill>
                   <a:srgbClr val="7A869C"/>
                 </a:solidFill>
-                <a:latin typeface="나눔고딕코딩"/>
-                <a:ea typeface="나눔고딕코딩"/>
-                <a:cs typeface="나눔고딕코딩"/>
+                <a:latin typeface="D2Coding"/>
+                <a:ea typeface="D2Coding"/>
+                <a:cs typeface="D2Coding"/>
               </a:rPr>
               <a:t>2</a:t>
             </a:r>
@@ -43788,9 +43788,9 @@
                 <a:solidFill>
                   <a:srgbClr val="7A869C"/>
                 </a:solidFill>
-                <a:latin typeface="나눔고딕코딩"/>
-                <a:ea typeface="나눔고딕코딩"/>
-                <a:cs typeface="나눔고딕코딩"/>
+                <a:latin typeface="D2Coding"/>
+                <a:ea typeface="D2Coding"/>
+                <a:cs typeface="D2Coding"/>
               </a:rPr>
               <a:t>3</a:t>
             </a:r>
@@ -43806,9 +43806,9 @@
                 <a:solidFill>
                   <a:srgbClr val="7A869C"/>
                 </a:solidFill>
-                <a:latin typeface="나눔고딕코딩"/>
-                <a:ea typeface="나눔고딕코딩"/>
-                <a:cs typeface="나눔고딕코딩"/>
+                <a:latin typeface="D2Coding"/>
+                <a:ea typeface="D2Coding"/>
+                <a:cs typeface="D2Coding"/>
               </a:rPr>
               <a:t>4</a:t>
             </a:r>
@@ -43824,9 +43824,9 @@
                 <a:solidFill>
                   <a:srgbClr val="7A869C"/>
                 </a:solidFill>
-                <a:latin typeface="나눔고딕코딩"/>
-                <a:ea typeface="나눔고딕코딩"/>
-                <a:cs typeface="나눔고딕코딩"/>
+                <a:latin typeface="D2Coding"/>
+                <a:ea typeface="D2Coding"/>
+                <a:cs typeface="D2Coding"/>
               </a:rPr>
               <a:t>5</a:t>
             </a:r>
@@ -43842,9 +43842,9 @@
                 <a:solidFill>
                   <a:srgbClr val="7A869C"/>
                 </a:solidFill>
-                <a:latin typeface="나눔고딕코딩"/>
-                <a:ea typeface="나눔고딕코딩"/>
-                <a:cs typeface="나눔고딕코딩"/>
+                <a:latin typeface="D2Coding"/>
+                <a:ea typeface="D2Coding"/>
+                <a:cs typeface="D2Coding"/>
               </a:rPr>
               <a:t>6</a:t>
             </a:r>
@@ -43860,9 +43860,9 @@
                 <a:solidFill>
                   <a:srgbClr val="7A869C"/>
                 </a:solidFill>
-                <a:latin typeface="나눔고딕코딩"/>
-                <a:ea typeface="나눔고딕코딩"/>
-                <a:cs typeface="나눔고딕코딩"/>
+                <a:latin typeface="D2Coding"/>
+                <a:ea typeface="D2Coding"/>
+                <a:cs typeface="D2Coding"/>
               </a:rPr>
               <a:t>7</a:t>
             </a:r>
@@ -43901,9 +43901,9 @@
                 <a:solidFill>
                   <a:srgbClr val="E6EAF2"/>
                 </a:solidFill>
-                <a:latin typeface="나눔고딕코딩"/>
-                <a:ea typeface="나눔고딕코딩"/>
-                <a:cs typeface="나눔고딕코딩"/>
+                <a:latin typeface="D2Coding"/>
+                <a:ea typeface="D2Coding"/>
+                <a:cs typeface="D2Coding"/>
               </a:rPr>
               <a:t>SELECT order_id, cust_id, order_date, status</a:t>
             </a:r>
@@ -43919,9 +43919,9 @@
                 <a:solidFill>
                   <a:srgbClr val="E6EAF2"/>
                 </a:solidFill>
-                <a:latin typeface="나눔고딕코딩"/>
-                <a:ea typeface="나눔고딕코딩"/>
-                <a:cs typeface="나눔고딕코딩"/>
+                <a:latin typeface="D2Coding"/>
+                <a:ea typeface="D2Coding"/>
+                <a:cs typeface="D2Coding"/>
               </a:rPr>
               <a:t>FROM   orders</a:t>
             </a:r>
@@ -43937,9 +43937,9 @@
                 <a:solidFill>
                   <a:srgbClr val="E6EAF2"/>
                 </a:solidFill>
-                <a:latin typeface="나눔고딕코딩"/>
-                <a:ea typeface="나눔고딕코딩"/>
-                <a:cs typeface="나눔고딕코딩"/>
+                <a:latin typeface="D2Coding"/>
+                <a:ea typeface="D2Coding"/>
+                <a:cs typeface="D2Coding"/>
               </a:rPr>
               <a:t>WHERE  cust_id IN (SELECT cust_id FROM customers WHERE grade = 'VIP');</a:t>
             </a:r>
@@ -43955,9 +43955,9 @@
                 <a:solidFill>
                   <a:srgbClr val="E6EAF2"/>
                 </a:solidFill>
-                <a:latin typeface="나눔고딕코딩"/>
-                <a:ea typeface="나눔고딕코딩"/>
-                <a:cs typeface="나눔고딕코딩"/>
+                <a:latin typeface="D2Coding"/>
+                <a:ea typeface="D2Coding"/>
+                <a:cs typeface="D2Coding"/>
               </a:rPr>
               <a:t/>
             </a:r>
@@ -43973,9 +43973,9 @@
                 <a:solidFill>
                   <a:srgbClr val="E6EAF2"/>
                 </a:solidFill>
-                <a:latin typeface="나눔고딕코딩"/>
-                <a:ea typeface="나눔고딕코딩"/>
-                <a:cs typeface="나눔고딕코딩"/>
+                <a:latin typeface="D2Coding"/>
+                <a:ea typeface="D2Coding"/>
+                <a:cs typeface="D2Coding"/>
               </a:rPr>
               <a:t>-- 단일행 연산자 = 를 쓰면 오류!</a:t>
             </a:r>
@@ -43991,9 +43991,9 @@
                 <a:solidFill>
                   <a:srgbClr val="E6EAF2"/>
                 </a:solidFill>
-                <a:latin typeface="나눔고딕코딩"/>
-                <a:ea typeface="나눔고딕코딩"/>
-                <a:cs typeface="나눔고딕코딩"/>
+                <a:latin typeface="D2Coding"/>
+                <a:ea typeface="D2Coding"/>
+                <a:cs typeface="D2Coding"/>
               </a:rPr>
               <a:t>-- WHERE cust_id = (SELECT cust_id FROM customers WHERE grade = 'VIP')</a:t>
             </a:r>
@@ -44009,9 +44009,9 @@
                 <a:solidFill>
                   <a:srgbClr val="E6EAF2"/>
                 </a:solidFill>
-                <a:latin typeface="나눔고딕코딩"/>
-                <a:ea typeface="나눔고딕코딩"/>
-                <a:cs typeface="나눔고딕코딩"/>
+                <a:latin typeface="D2Coding"/>
+                <a:ea typeface="D2Coding"/>
+                <a:cs typeface="D2Coding"/>
               </a:rPr>
               <a:t>-- ERROR 1242: Subquery returns more than 1 row</a:t>
             </a:r>
